--- a/curso/semana-05-rsu-y-backlog/nuestras-entregas/Priorizacion_MoSCoW_100_Puntos_NewBit/Priorizacion_MoSCoW_100_Puntos_NewBit.pptx
+++ b/curso/semana-05-rsu-y-backlog/nuestras-entregas/Priorizacion_MoSCoW_100_Puntos_NewBit/Priorizacion_MoSCoW_100_Puntos_NewBit.pptx
@@ -4178,7 +4178,7 @@
                 <a:ea typeface="Calibri" pitchFamily="34" charset="-122"/>
                 <a:cs typeface="Calibri" pitchFamily="34" charset="-120"/>
               </a:rPr>
-              <a:t>Etiquetar el clip</a:t>
+              <a:t>Clasificar y tipificar</a:t>
             </a:r>
             <a:endParaRPr lang="en-US" sz="1000" dirty="0"/>
           </a:p>
@@ -4300,7 +4300,7 @@
                 <a:ea typeface="Calibri" pitchFamily="34" charset="-122"/>
                 <a:cs typeface="Calibri" pitchFamily="34" charset="-120"/>
               </a:rPr>
-              <a:t>Detectar trabajadores</a:t>
+              <a:t>Detectar operarios</a:t>
             </a:r>
             <a:endParaRPr lang="en-US" sz="1000" dirty="0"/>
           </a:p>
@@ -5154,7 +5154,7 @@
                 <a:ea typeface="Calibri" pitchFamily="34" charset="-122"/>
                 <a:cs typeface="Calibri" pitchFamily="34" charset="-120"/>
               </a:rPr>
-              <a:t>Alerta insegura</a:t>
+              <a:t>Alerta de riesgo</a:t>
             </a:r>
             <a:endParaRPr lang="en-US" sz="1000" dirty="0"/>
           </a:p>
@@ -5642,7 +5642,7 @@
                 <a:ea typeface="Calibri" pitchFamily="34" charset="-122"/>
                 <a:cs typeface="Calibri" pitchFamily="34" charset="-120"/>
               </a:rPr>
-              <a:t>Ajustar umbral</a:t>
+              <a:t>Calibrar umbral</a:t>
             </a:r>
             <a:endParaRPr lang="en-US" sz="1000" dirty="0"/>
           </a:p>
@@ -6976,7 +6976,7 @@
                 <a:ea typeface="Calibri" pitchFamily="34" charset="-122"/>
                 <a:cs typeface="Calibri" pitchFamily="34" charset="-120"/>
               </a:rPr>
-              <a:t>Etiquetar el clip</a:t>
+              <a:t>Clasificar y tipificar</a:t>
             </a:r>
             <a:endParaRPr lang="en-US" sz="1000" dirty="0"/>
           </a:p>
@@ -7274,7 +7274,7 @@
                 <a:ea typeface="Calibri" pitchFamily="34" charset="-122"/>
                 <a:cs typeface="Calibri" pitchFamily="34" charset="-120"/>
               </a:rPr>
-              <a:t>Detectar trabajadores</a:t>
+              <a:t>Detectar operarios</a:t>
             </a:r>
             <a:endParaRPr lang="en-US" sz="1000" dirty="0"/>
           </a:p>
@@ -8426,7 +8426,7 @@
                 <a:ea typeface="Calibri" pitchFamily="34" charset="-122"/>
                 <a:cs typeface="Calibri" pitchFamily="34" charset="-120"/>
               </a:rPr>
-              <a:t>Alerta insegura</a:t>
+              <a:t>Alerta de riesgo</a:t>
             </a:r>
             <a:endParaRPr lang="en-US" sz="1000" dirty="0"/>
           </a:p>
@@ -9856,7 +9856,7 @@
                 <a:ea typeface="Calibri" pitchFamily="34" charset="-122"/>
                 <a:cs typeface="Calibri" pitchFamily="34" charset="-120"/>
               </a:rPr>
-              <a:t>Ajustar umbral</a:t>
+              <a:t>Calibrar umbral</a:t>
             </a:r>
             <a:endParaRPr lang="en-US" sz="1000" dirty="0"/>
           </a:p>
@@ -11485,7 +11485,7 @@
                 <a:ea typeface="Calibri" pitchFamily="34" charset="-122"/>
                 <a:cs typeface="Calibri" pitchFamily="34" charset="-120"/>
               </a:rPr>
-              <a:t>Detectar trabajadores</a:t>
+              <a:t>Detectar operarios</a:t>
             </a:r>
             <a:endParaRPr lang="en-US" sz="1000" dirty="0"/>
           </a:p>
@@ -12705,7 +12705,7 @@
                 <a:ea typeface="Calibri" pitchFamily="34" charset="-122"/>
                 <a:cs typeface="Calibri" pitchFamily="34" charset="-120"/>
               </a:rPr>
-              <a:t>Etiquetar el clip</a:t>
+              <a:t>Clasificar y tipificar</a:t>
             </a:r>
             <a:endParaRPr lang="en-US" sz="1000" dirty="0"/>
           </a:p>
@@ -13315,7 +13315,7 @@
                 <a:ea typeface="Calibri" pitchFamily="34" charset="-122"/>
                 <a:cs typeface="Calibri" pitchFamily="34" charset="-120"/>
               </a:rPr>
-              <a:t>Alerta insegura</a:t>
+              <a:t>Alerta de riesgo</a:t>
             </a:r>
             <a:endParaRPr lang="en-US" sz="1000" dirty="0"/>
           </a:p>
@@ -14220,7 +14220,7 @@
                 <a:ea typeface="Calibri" pitchFamily="34" charset="-122"/>
                 <a:cs typeface="Calibri" pitchFamily="34" charset="-120"/>
               </a:rPr>
-              <a:t>Ajustar umbral</a:t>
+              <a:t>Calibrar umbral</a:t>
             </a:r>
             <a:endParaRPr lang="en-US" sz="1000" dirty="0"/>
           </a:p>
